--- a/presentation/Medical-Cost-Analysis-and-Visualization-System.pptx
+++ b/presentation/Medical-Cost-Analysis-and-Visualization-System.pptx
@@ -5597,7 +5597,7 @@
         </p:nvSpPr>
         <p:spPr>
           <a:xfrm>
-            <a:off x="496119" y="3242667"/>
+            <a:off x="496119" y="3100054"/>
             <a:ext cx="4722763" cy="14288"/>
           </a:xfrm>
           <a:prstGeom prst="roundRect">
@@ -5621,8 +5621,8 @@
         </p:nvSpPr>
         <p:spPr>
           <a:xfrm>
-            <a:off x="496119" y="3430265"/>
-            <a:ext cx="4722763" cy="1310134"/>
+            <a:off x="496119" y="3991855"/>
+            <a:ext cx="4722763" cy="926584"/>
           </a:xfrm>
           <a:prstGeom prst="rect">
             <a:avLst/>
@@ -5707,6 +5707,72 @@
               </a:rPr>
               <a:t>Qusai · Lovely Professional University</a:t>
             </a:r>
+            <a:endParaRPr lang="en-US" sz="1000" dirty="0"/>
+          </a:p>
+        </p:txBody>
+      </p:sp>
+      <p:sp>
+        <p:nvSpPr>
+          <p:cNvPr id="7" name="TextBox 6">
+            <a:extLst>
+              <a:ext uri="{FF2B5EF4-FFF2-40B4-BE49-F238E27FC236}">
+                <a16:creationId xmlns:a16="http://schemas.microsoft.com/office/drawing/2014/main" id="{87436494-A3B7-3173-EBB6-A57D78FCE060}"/>
+              </a:ext>
+            </a:extLst>
+          </p:cNvPr>
+          <p:cNvSpPr txBox="1"/>
+          <p:nvPr/>
+        </p:nvSpPr>
+        <p:spPr>
+          <a:xfrm>
+            <a:off x="730484" y="3107198"/>
+            <a:ext cx="4254031" cy="861774"/>
+          </a:xfrm>
+          <a:prstGeom prst="rect">
+            <a:avLst/>
+          </a:prstGeom>
+          <a:noFill/>
+        </p:spPr>
+        <p:txBody>
+          <a:bodyPr wrap="square" rtlCol="0">
+            <a:spAutoFit/>
+          </a:bodyPr>
+          <a:lstStyle/>
+          <a:p>
+            <a:r>
+              <a:rPr lang="en-US" sz="1000" dirty="0"/>
+              <a:t>GitHub Repository:</a:t>
+            </a:r>
+          </a:p>
+          <a:p>
+            <a:r>
+              <a:rPr lang="en-US" sz="1000" dirty="0"/>
+              <a:t> </a:t>
+            </a:r>
+            <a:r>
+              <a:rPr lang="en-US" sz="1000" dirty="0">
+                <a:hlinkClick r:id="rId4"/>
+              </a:rPr>
+              <a:t>https://github.com/Qusvi/Medical-Cost-Analysis</a:t>
+            </a:r>
+            <a:br>
+              <a:rPr lang="en-US" sz="1000" dirty="0"/>
+            </a:br>
+            <a:r>
+              <a:rPr lang="en-US" sz="1000" dirty="0"/>
+              <a:t>Live Application:</a:t>
+            </a:r>
+          </a:p>
+          <a:p>
+            <a:r>
+              <a:rPr lang="en-US" sz="1000" dirty="0">
+                <a:hlinkClick r:id="rId5"/>
+              </a:rPr>
+              <a:t>https://medical-cost-analysis-n9ya8jqvxyfvuk5brynd4l.streamlit.app/</a:t>
+            </a:r>
+            <a:endParaRPr lang="en-US" sz="1000" dirty="0"/>
+          </a:p>
+          <a:p>
             <a:endParaRPr lang="en-US" sz="1000" dirty="0"/>
           </a:p>
         </p:txBody>
